--- a/발표자료.pptx
+++ b/발표자료.pptx
@@ -2340,7 +2340,7 @@
                 <a:ea typeface="Malgun Gothic" pitchFamily="34" charset="-122"/>
                 <a:cs typeface="Malgun Gothic" pitchFamily="34" charset="-120"/>
               </a:rPr>
-              <a:t>serve 로 로컬 정적 서버 구동</a:t>
+              <a:t>GitHub Pages로 실제 배포</a:t>
             </a:r>
             <a:endParaRPr lang="en-US" sz="1300" dirty="0"/>
           </a:p>
@@ -2630,7 +2630,7 @@
                 <a:ea typeface="Malgun Gothic" pitchFamily="34" charset="-122"/>
                 <a:cs typeface="Malgun Gothic" pitchFamily="34" charset="-120"/>
               </a:rPr>
-              <a:t>랜딩 페이지 (부티크 컨셉 리디자인)</a:t>
+              <a:t>랜딩 페이지 (부티크 컨셉 리디자인, GitHub Pages 배포)</a:t>
             </a:r>
             <a:endParaRPr lang="en-US" sz="1600" dirty="0"/>
           </a:p>
@@ -2728,7 +2728,7 @@
                 <a:ea typeface="Malgun Gothic" pitchFamily="34" charset="-122"/>
                 <a:cs typeface="Malgun Gothic" pitchFamily="34" charset="-120"/>
               </a:rPr>
-              <a:t>메뉴 목록 → 상세 (옵션 커스터마이징)</a:t>
+              <a:t>메뉴 목록 → 상세 (옵션 커스터마이징 + 담긴 장바구니 미리보기)</a:t>
             </a:r>
             <a:endParaRPr lang="en-US" sz="1600" dirty="0"/>
           </a:p>
@@ -3494,7 +3494,7 @@
                 <a:ea typeface="Malgun Gothic" pitchFamily="34" charset="-122"/>
                 <a:cs typeface="Malgun Gothic" pitchFamily="34" charset="-120"/>
               </a:rPr>
-              <a:t>메뉴 사진 중 실제로 '한 입 먹은' 사진이 섞여 있음</a:t>
+              <a:t>GitHub Pages 배포 후 메뉴 이미지가 전부 깨짐</a:t>
             </a:r>
             <a:endParaRPr lang="en-US" sz="1500" dirty="0"/>
           </a:p>
@@ -3514,7 +3514,7 @@
                 <a:ea typeface="Malgun Gothic" pitchFamily="34" charset="-122"/>
                 <a:cs typeface="Malgun Gothic" pitchFamily="34" charset="-120"/>
               </a:rPr>
-              <a:t>→ 전체 18개 이미지 전수 점검 → 티라미수/쿠키/케이크 등 부적절한 사진 교체</a:t>
+              <a:t>→ 절대경로(/images/...)가 하위 경로 배포와 안 맞아 발생 → 스크립트 위치 기준 동적 경로로 해결</a:t>
             </a:r>
             <a:endParaRPr lang="en-US" sz="1500" dirty="0"/>
           </a:p>
